--- a/Software Design/01. Course Introduction.pptx
+++ b/Software Design/01. Course Introduction.pptx
@@ -247,7 +247,7 @@
             <a:fld id="{DA36EAF5-5497-4E36-9AC6-23E218E1C14C}" type="datetimeFigureOut">
               <a:rPr lang="en-US" smtClean="0"/>
               <a:pPr/>
-              <a:t>5/17/2025</a:t>
+              <a:t>5/15/2026</a:t>
             </a:fld>
             <a:endParaRPr lang="en-US"/>
           </a:p>
@@ -868,7 +868,7 @@
               <a:pPr>
                 <a:defRPr/>
               </a:pPr>
-              <a:t>5/17/2025</a:t>
+              <a:t>5/15/2026</a:t>
             </a:fld>
             <a:endParaRPr lang="en-US"/>
           </a:p>
@@ -1060,7 +1060,7 @@
               <a:pPr>
                 <a:defRPr/>
               </a:pPr>
-              <a:t>5/17/2025</a:t>
+              <a:t>5/15/2026</a:t>
             </a:fld>
             <a:endParaRPr lang="en-US"/>
           </a:p>
@@ -1262,7 +1262,7 @@
               <a:pPr>
                 <a:defRPr/>
               </a:pPr>
-              <a:t>5/17/2025</a:t>
+              <a:t>5/15/2026</a:t>
             </a:fld>
             <a:endParaRPr lang="en-US"/>
           </a:p>
@@ -1454,7 +1454,7 @@
               <a:pPr>
                 <a:defRPr/>
               </a:pPr>
-              <a:t>5/17/2025</a:t>
+              <a:t>5/15/2026</a:t>
             </a:fld>
             <a:endParaRPr lang="en-US"/>
           </a:p>
@@ -1722,7 +1722,7 @@
               <a:pPr>
                 <a:defRPr/>
               </a:pPr>
-              <a:t>5/17/2025</a:t>
+              <a:t>5/15/2026</a:t>
             </a:fld>
             <a:endParaRPr lang="en-US"/>
           </a:p>
@@ -2032,7 +2032,7 @@
               <a:pPr>
                 <a:defRPr/>
               </a:pPr>
-              <a:t>5/17/2025</a:t>
+              <a:t>5/15/2026</a:t>
             </a:fld>
             <a:endParaRPr lang="en-US"/>
           </a:p>
@@ -2476,7 +2476,7 @@
               <a:pPr>
                 <a:defRPr/>
               </a:pPr>
-              <a:t>5/17/2025</a:t>
+              <a:t>5/15/2026</a:t>
             </a:fld>
             <a:endParaRPr lang="en-US"/>
           </a:p>
@@ -2616,7 +2616,7 @@
               <a:pPr>
                 <a:defRPr/>
               </a:pPr>
-              <a:t>5/17/2025</a:t>
+              <a:t>5/15/2026</a:t>
             </a:fld>
             <a:endParaRPr lang="en-US"/>
           </a:p>
@@ -2733,7 +2733,7 @@
               <a:pPr>
                 <a:defRPr/>
               </a:pPr>
-              <a:t>5/17/2025</a:t>
+              <a:t>5/15/2026</a:t>
             </a:fld>
             <a:endParaRPr lang="en-US"/>
           </a:p>
@@ -3032,7 +3032,7 @@
               <a:pPr>
                 <a:defRPr/>
               </a:pPr>
-              <a:t>5/17/2025</a:t>
+              <a:t>5/15/2026</a:t>
             </a:fld>
             <a:endParaRPr lang="en-US"/>
           </a:p>
@@ -3310,7 +3310,7 @@
               <a:pPr>
                 <a:defRPr/>
               </a:pPr>
-              <a:t>5/17/2025</a:t>
+              <a:t>5/15/2026</a:t>
             </a:fld>
             <a:endParaRPr lang="en-US"/>
           </a:p>
@@ -3558,7 +3558,7 @@
               <a:pPr>
                 <a:defRPr/>
               </a:pPr>
-              <a:t>5/17/2025</a:t>
+              <a:t>5/15/2026</a:t>
             </a:fld>
             <a:endParaRPr lang="en-US"/>
           </a:p>
@@ -4954,6 +4954,13 @@
               <a:buAutoNum type="arabicPeriod"/>
             </a:pPr>
             <a:r>
+              <a:rPr lang="en-US" sz="2400" dirty="0" smtClean="0">
+                <a:latin typeface="Calibri" pitchFamily="34" charset="0"/>
+                <a:cs typeface="Calibri" pitchFamily="34" charset="0"/>
+              </a:rPr>
+              <a:t>Design, </a:t>
+            </a:r>
+            <a:r>
               <a:rPr lang="en-US" sz="2400" i="1" dirty="0" smtClean="0">
                 <a:solidFill>
                   <a:srgbClr val="C00000"/>
@@ -4961,7 +4968,7 @@
                 <a:latin typeface="Calibri" pitchFamily="34" charset="0"/>
                 <a:cs typeface="Calibri" pitchFamily="34" charset="0"/>
               </a:rPr>
-              <a:t>Design</a:t>
+              <a:t>recover</a:t>
             </a:r>
             <a:r>
               <a:rPr lang="en-US" sz="2400" dirty="0" smtClean="0">
@@ -4978,15 +4985,21 @@
                 <a:latin typeface="Calibri" pitchFamily="34" charset="0"/>
                 <a:cs typeface="Calibri" pitchFamily="34" charset="0"/>
               </a:rPr>
-              <a:t>document</a:t>
+              <a:t>refine</a:t>
             </a:r>
             <a:r>
               <a:rPr lang="en-US" sz="2400" dirty="0" smtClean="0">
                 <a:latin typeface="Calibri" pitchFamily="34" charset="0"/>
                 <a:cs typeface="Calibri" pitchFamily="34" charset="0"/>
               </a:rPr>
-              <a:t> and </a:t>
-            </a:r>
+              <a:t>, document, and communicate software architecture that meets architectural quality requirements.</a:t>
+            </a:r>
+          </a:p>
+          <a:p>
+            <a:pPr>
+              <a:buFont typeface="+mj-lt"/>
+              <a:buAutoNum type="arabicPeriod"/>
+            </a:pPr>
             <a:r>
               <a:rPr lang="en-US" sz="2400" i="1" dirty="0" smtClean="0">
                 <a:solidFill>
@@ -4995,14 +5008,21 @@
                 <a:latin typeface="Calibri" pitchFamily="34" charset="0"/>
                 <a:cs typeface="Calibri" pitchFamily="34" charset="0"/>
               </a:rPr>
-              <a:t>communicate</a:t>
+              <a:t>Evaluate</a:t>
             </a:r>
             <a:r>
               <a:rPr lang="en-US" sz="2400" dirty="0" smtClean="0">
                 <a:latin typeface="Calibri" pitchFamily="34" charset="0"/>
                 <a:cs typeface="Calibri" pitchFamily="34" charset="0"/>
               </a:rPr>
-              <a:t> software architecture that meets architectural quality requirements.</a:t>
+              <a:t> </a:t>
+            </a:r>
+            <a:r>
+              <a:rPr lang="en-US" sz="2400" dirty="0" smtClean="0">
+                <a:latin typeface="Calibri" pitchFamily="34" charset="0"/>
+                <a:cs typeface="Calibri" pitchFamily="34" charset="0"/>
+              </a:rPr>
+              <a:t>software architecture.</a:t>
             </a:r>
           </a:p>
           <a:p>
@@ -5010,6 +5030,13 @@
               <a:buFont typeface="+mj-lt"/>
               <a:buAutoNum type="arabicPeriod"/>
             </a:pPr>
+            <a:r>
+              <a:rPr lang="en-US" sz="2400" dirty="0" smtClean="0">
+                <a:latin typeface="Calibri" pitchFamily="34" charset="0"/>
+                <a:cs typeface="Calibri" pitchFamily="34" charset="0"/>
+              </a:rPr>
+              <a:t>Use </a:t>
+            </a:r>
             <a:r>
               <a:rPr lang="en-US" sz="2400" i="1" dirty="0" smtClean="0">
                 <a:solidFill>
@@ -5018,15 +5045,26 @@
                 <a:latin typeface="Calibri" pitchFamily="34" charset="0"/>
                 <a:cs typeface="Calibri" pitchFamily="34" charset="0"/>
               </a:rPr>
-              <a:t>Evaluate</a:t>
+              <a:t>tools</a:t>
             </a:r>
             <a:r>
               <a:rPr lang="en-US" sz="2400" dirty="0" smtClean="0">
                 <a:latin typeface="Calibri" pitchFamily="34" charset="0"/>
                 <a:cs typeface="Calibri" pitchFamily="34" charset="0"/>
               </a:rPr>
-              <a:t> software architecture.</a:t>
-            </a:r>
+              <a:t> </a:t>
+            </a:r>
+            <a:r>
+              <a:rPr lang="en-US" sz="2400" dirty="0" smtClean="0">
+                <a:latin typeface="Calibri" pitchFamily="34" charset="0"/>
+                <a:cs typeface="Calibri" pitchFamily="34" charset="0"/>
+              </a:rPr>
+              <a:t>to design, recover, refine, communicate, and evaluate software architecture.</a:t>
+            </a:r>
+            <a:endParaRPr lang="en-US" sz="2400" dirty="0" smtClean="0">
+              <a:latin typeface="Calibri" pitchFamily="34" charset="0"/>
+              <a:cs typeface="Calibri" pitchFamily="34" charset="0"/>
+            </a:endParaRPr>
           </a:p>
           <a:p>
             <a:pPr>
@@ -5038,37 +5076,7 @@
                 <a:latin typeface="Calibri" pitchFamily="34" charset="0"/>
                 <a:cs typeface="Calibri" pitchFamily="34" charset="0"/>
               </a:rPr>
-              <a:t>Use </a:t>
-            </a:r>
-            <a:r>
-              <a:rPr lang="en-US" sz="2400" i="1" dirty="0" smtClean="0">
-                <a:solidFill>
-                  <a:srgbClr val="C00000"/>
-                </a:solidFill>
-                <a:latin typeface="Calibri" pitchFamily="34" charset="0"/>
-                <a:cs typeface="Calibri" pitchFamily="34" charset="0"/>
-              </a:rPr>
-              <a:t>tools</a:t>
-            </a:r>
-            <a:r>
-              <a:rPr lang="en-US" sz="2400" dirty="0" smtClean="0">
-                <a:latin typeface="Calibri" pitchFamily="34" charset="0"/>
-                <a:cs typeface="Calibri" pitchFamily="34" charset="0"/>
-              </a:rPr>
-              <a:t> for designing, communicating and evaluating software architecture.</a:t>
-            </a:r>
-          </a:p>
-          <a:p>
-            <a:pPr>
-              <a:buFont typeface="+mj-lt"/>
-              <a:buAutoNum type="arabicPeriod"/>
-            </a:pPr>
-            <a:r>
-              <a:rPr lang="en-US" sz="2400" dirty="0" smtClean="0">
-                <a:latin typeface="Calibri" pitchFamily="34" charset="0"/>
-                <a:cs typeface="Calibri" pitchFamily="34" charset="0"/>
-              </a:rPr>
-              <a:t>Explain </a:t>
+              <a:t>Explain the </a:t>
             </a:r>
             <a:r>
               <a:rPr lang="en-US" sz="2400" i="1" dirty="0" smtClean="0">
@@ -5963,7 +5971,7 @@
             </a:pPr>
             <a:r>
               <a:rPr lang="en-US" sz="2400" dirty="0" smtClean="0"/>
-              <a:t>Lambda Architecture</a:t>
+              <a:t>Kappa Architecture</a:t>
             </a:r>
           </a:p>
           <a:p>
@@ -5973,8 +5981,19 @@
             </a:pPr>
             <a:r>
               <a:rPr lang="en-US" sz="2400" dirty="0" smtClean="0"/>
-              <a:t>Software Integration</a:t>
-            </a:r>
+              <a:t>AI Agent Frameworks and Design Patterns</a:t>
+            </a:r>
+          </a:p>
+          <a:p>
+            <a:pPr marL="571500" indent="-571500">
+              <a:buFont typeface="+mj-lt"/>
+              <a:buAutoNum type="romanUcPeriod"/>
+            </a:pPr>
+            <a:r>
+              <a:rPr lang="en-US" sz="2400" dirty="0" err="1" smtClean="0"/>
+              <a:t>MLOps</a:t>
+            </a:r>
+            <a:endParaRPr lang="en-US" sz="2400" dirty="0" smtClean="0"/>
           </a:p>
         </p:txBody>
       </p:sp>
@@ -6095,14 +6114,14 @@
               <a:t>	</a:t>
             </a:r>
             <a:r>
-              <a:rPr lang="vi-VN" sz="2600" i="1" dirty="0" smtClean="0">
+              <a:rPr lang="en-US" sz="2600" i="1" dirty="0" smtClean="0">
                 <a:solidFill>
                   <a:srgbClr val="C00000"/>
                 </a:solidFill>
                 <a:latin typeface="Calibri" pitchFamily="34" charset="0"/>
                 <a:cs typeface="Calibri" pitchFamily="34" charset="0"/>
               </a:rPr>
-              <a:t>120</a:t>
+              <a:t>90</a:t>
             </a:r>
             <a:endParaRPr lang="en-US" sz="2600" i="1" dirty="0">
               <a:solidFill>
@@ -6365,7 +6384,42 @@
                 <a:latin typeface="Calibri" pitchFamily="34" charset="0"/>
                 <a:cs typeface="Calibri" pitchFamily="34" charset="0"/>
               </a:rPr>
-              <a:t>2 individual tests in classroom (20%)</a:t>
+              <a:t>Midterm </a:t>
+            </a:r>
+            <a:r>
+              <a:rPr lang="en-US" sz="2000" dirty="0" smtClean="0">
+                <a:latin typeface="Calibri" pitchFamily="34" charset="0"/>
+                <a:cs typeface="Calibri" pitchFamily="34" charset="0"/>
+              </a:rPr>
+              <a:t>exam (</a:t>
+            </a:r>
+            <a:r>
+              <a:rPr lang="en-US" sz="2000" dirty="0" smtClean="0">
+                <a:latin typeface="Calibri" pitchFamily="34" charset="0"/>
+                <a:cs typeface="Calibri" pitchFamily="34" charset="0"/>
+              </a:rPr>
+              <a:t>first </a:t>
+            </a:r>
+            <a:r>
+              <a:rPr lang="en-US" sz="2000" dirty="0" smtClean="0">
+                <a:latin typeface="Calibri" pitchFamily="34" charset="0"/>
+                <a:cs typeface="Calibri" pitchFamily="34" charset="0"/>
+              </a:rPr>
+              <a:t>2 labs) </a:t>
+            </a:r>
+            <a:r>
+              <a:rPr lang="en-US" sz="2000" dirty="0" smtClean="0">
+                <a:latin typeface="Calibri" pitchFamily="34" charset="0"/>
+                <a:cs typeface="Calibri" pitchFamily="34" charset="0"/>
+              </a:rPr>
+              <a:t>(20</a:t>
+            </a:r>
+            <a:r>
+              <a:rPr lang="en-US" sz="2000" dirty="0" smtClean="0">
+                <a:latin typeface="Calibri" pitchFamily="34" charset="0"/>
+                <a:cs typeface="Calibri" pitchFamily="34" charset="0"/>
+              </a:rPr>
+              <a:t>%)</a:t>
             </a:r>
           </a:p>
           <a:p>
@@ -6378,7 +6432,21 @@
                 <a:latin typeface="Calibri" pitchFamily="34" charset="0"/>
                 <a:cs typeface="Calibri" pitchFamily="34" charset="0"/>
               </a:rPr>
-              <a:t>4 individual labs (40%)</a:t>
+              <a:t>4</a:t>
+            </a:r>
+            <a:r>
+              <a:rPr lang="en-US" sz="2000" dirty="0" smtClean="0">
+                <a:latin typeface="Calibri" pitchFamily="34" charset="0"/>
+                <a:cs typeface="Calibri" pitchFamily="34" charset="0"/>
+              </a:rPr>
+              <a:t> additional individual labs </a:t>
+            </a:r>
+            <a:r>
+              <a:rPr lang="en-US" sz="2000" dirty="0" smtClean="0">
+                <a:latin typeface="Calibri" pitchFamily="34" charset="0"/>
+                <a:cs typeface="Calibri" pitchFamily="34" charset="0"/>
+              </a:rPr>
+              <a:t>(40%)</a:t>
             </a:r>
           </a:p>
           <a:p>
@@ -6404,7 +6472,14 @@
                 <a:latin typeface="Calibri" pitchFamily="34" charset="0"/>
                 <a:cs typeface="Calibri" pitchFamily="34" charset="0"/>
               </a:rPr>
-              <a:t>Bonus points (up to 20%) for:</a:t>
+              <a:t>Bonus </a:t>
+            </a:r>
+            <a:r>
+              <a:rPr lang="en-US" sz="2400" b="1" dirty="0" smtClean="0">
+                <a:latin typeface="Calibri" pitchFamily="34" charset="0"/>
+                <a:cs typeface="Calibri" pitchFamily="34" charset="0"/>
+              </a:rPr>
+              <a:t>points (up to 20%) for:</a:t>
             </a:r>
           </a:p>
           <a:p>
@@ -6600,7 +6675,7 @@
           <a:p>
             <a:r>
               <a:rPr lang="en-US" dirty="0" smtClean="0"/>
-              <a:t>Individual Tests in Classroom (20%)</a:t>
+              <a:t>Midterm Exam (20%)</a:t>
             </a:r>
             <a:endParaRPr lang="en-US" dirty="0"/>
           </a:p>
@@ -6624,23 +6699,51 @@
             <a:pPr lvl="0"/>
             <a:r>
               <a:rPr lang="en-US" sz="2400" dirty="0" smtClean="0"/>
-              <a:t>Individual test #1: 10%</a:t>
-            </a:r>
-          </a:p>
-          <a:p>
+              <a:t>Core Concepts.</a:t>
+            </a:r>
+          </a:p>
+          <a:p>
+            <a:pPr lvl="0"/>
             <a:r>
               <a:rPr lang="en-US" sz="2400" dirty="0" smtClean="0"/>
-              <a:t>Individual test #2: 10%</a:t>
-            </a:r>
-          </a:p>
-          <a:p>
+              <a:t>Lab 01: </a:t>
+            </a:r>
+            <a:r>
+              <a:rPr lang="en-US" sz="2400" dirty="0" err="1" smtClean="0"/>
+              <a:t>Microservice</a:t>
+            </a:r>
             <a:r>
               <a:rPr lang="en-US" sz="2400" dirty="0" smtClean="0"/>
-              <a:t>Test date will not be noticed.</a:t>
-            </a:r>
-          </a:p>
-          <a:p>
-            <a:endParaRPr lang="en-US" sz="2400" dirty="0"/>
+              <a:t> Architecture.</a:t>
+            </a:r>
+          </a:p>
+          <a:p>
+            <a:pPr lvl="0"/>
+            <a:r>
+              <a:rPr lang="en-US" sz="2400" dirty="0" smtClean="0"/>
+              <a:t>Lab 02: </a:t>
+            </a:r>
+            <a:r>
+              <a:rPr lang="en-US" sz="2400" dirty="0" smtClean="0"/>
+              <a:t>The Clean Architecture and Domain Driven </a:t>
+            </a:r>
+            <a:r>
+              <a:rPr lang="en-US" sz="2400" dirty="0" smtClean="0"/>
+              <a:t>Design.</a:t>
+            </a:r>
+            <a:endParaRPr lang="en-US" sz="2400" dirty="0" smtClean="0"/>
+          </a:p>
+          <a:p>
+            <a:pPr lvl="0"/>
+            <a:r>
+              <a:rPr lang="en-US" sz="2400" dirty="0" smtClean="0"/>
+              <a:t>Held in classroom</a:t>
+            </a:r>
+            <a:r>
+              <a:rPr lang="en-US" sz="2400" dirty="0" smtClean="0"/>
+              <a:t>.</a:t>
+            </a:r>
+            <a:endParaRPr lang="en-US" sz="2400" dirty="0" smtClean="0"/>
           </a:p>
         </p:txBody>
       </p:sp>
@@ -6661,7 +6764,7 @@
         </p:blipFill>
         <p:spPr bwMode="auto">
           <a:xfrm>
-            <a:off x="2971800" y="3657600"/>
+            <a:off x="2971800" y="3810000"/>
             <a:ext cx="3429000" cy="2286000"/>
           </a:xfrm>
           <a:prstGeom prst="rect">
@@ -6711,8 +6814,26 @@
           <a:lstStyle/>
           <a:p>
             <a:r>
+              <a:rPr lang="en-US" dirty="0" smtClean="0">
+                <a:latin typeface="Calibri" pitchFamily="34" charset="0"/>
+                <a:cs typeface="Calibri" pitchFamily="34" charset="0"/>
+              </a:rPr>
+              <a:t>4 </a:t>
+            </a:r>
+            <a:r>
+              <a:rPr lang="en-US" dirty="0" smtClean="0">
+                <a:latin typeface="Calibri" pitchFamily="34" charset="0"/>
+                <a:cs typeface="Calibri" pitchFamily="34" charset="0"/>
+              </a:rPr>
+              <a:t>Additional </a:t>
+            </a:r>
+            <a:r>
               <a:rPr lang="en-US" dirty="0" smtClean="0"/>
-              <a:t>Individual Labs (40%)</a:t>
+              <a:t>Individual </a:t>
+            </a:r>
+            <a:r>
+              <a:rPr lang="en-US" dirty="0" smtClean="0"/>
+              <a:t>Labs (40%)</a:t>
             </a:r>
             <a:endParaRPr lang="en-US" dirty="0"/>
           </a:p>
@@ -6734,30 +6855,62 @@
           <a:lstStyle/>
           <a:p>
             <a:r>
+              <a:rPr lang="en-US" sz="2400" dirty="0" smtClean="0"/>
+              <a:t>CQRS and Event Sourcing</a:t>
+            </a:r>
+            <a:r>
+              <a:rPr lang="en-US" sz="2400" dirty="0" smtClean="0"/>
+              <a:t>: </a:t>
+            </a:r>
+            <a:r>
+              <a:rPr lang="en-US" sz="2400" dirty="0" smtClean="0"/>
+              <a:t>10</a:t>
+            </a:r>
+            <a:r>
+              <a:rPr lang="en-US" sz="2400" dirty="0" smtClean="0"/>
+              <a:t>%</a:t>
+            </a:r>
+          </a:p>
+          <a:p>
+            <a:r>
+              <a:rPr lang="en-US" sz="2400" dirty="0" smtClean="0"/>
+              <a:t>Event-Driven Architecture, or Serverless Architecture, or Kappa Architecture</a:t>
+            </a:r>
+            <a:r>
+              <a:rPr lang="en-US" sz="2400" dirty="0" smtClean="0"/>
+              <a:t>: </a:t>
+            </a:r>
+            <a:r>
+              <a:rPr lang="en-US" sz="2400" dirty="0" smtClean="0"/>
+              <a:t>10%</a:t>
+            </a:r>
+          </a:p>
+          <a:p>
+            <a:r>
+              <a:rPr lang="en-US" sz="2400" dirty="0" smtClean="0"/>
+              <a:t>AI </a:t>
+            </a:r>
+            <a:r>
+              <a:rPr lang="en-US" sz="2400" dirty="0" smtClean="0"/>
+              <a:t>Agent Frameworks and Design </a:t>
+            </a:r>
+            <a:r>
+              <a:rPr lang="en-US" sz="2400" dirty="0" smtClean="0"/>
+              <a:t>Patterns</a:t>
+            </a:r>
+            <a:r>
+              <a:rPr lang="en-US" sz="2400" dirty="0" smtClean="0"/>
+              <a:t>: 10%</a:t>
+            </a:r>
+          </a:p>
+          <a:p>
+            <a:r>
               <a:rPr lang="en-US" sz="2400" dirty="0" err="1" smtClean="0"/>
-              <a:t>Microservices</a:t>
+              <a:t>MLOps</a:t>
             </a:r>
             <a:r>
               <a:rPr lang="en-US" sz="2400" dirty="0" smtClean="0"/>
-              <a:t> Architecture: 10%</a:t>
-            </a:r>
-          </a:p>
-          <a:p>
-            <a:r>
-              <a:rPr lang="en-US" sz="2400" dirty="0" smtClean="0"/>
-              <a:t>The Clean Architecture and Domain Driven Design: 10%</a:t>
-            </a:r>
-          </a:p>
-          <a:p>
-            <a:r>
-              <a:rPr lang="en-US" sz="2400" dirty="0" smtClean="0"/>
-              <a:t>CQRS and Event Sourcing: 10%</a:t>
-            </a:r>
-          </a:p>
-          <a:p>
-            <a:r>
-              <a:rPr lang="en-US" sz="2400" dirty="0" smtClean="0"/>
-              <a:t>Event-Driven Architecture, or Serverless Architecture, or Lambda Architecture: 10%</a:t>
+              <a:t>: 10%</a:t>
             </a:r>
           </a:p>
         </p:txBody>
@@ -6779,7 +6932,7 @@
         </p:blipFill>
         <p:spPr bwMode="auto">
           <a:xfrm>
-            <a:off x="3733800" y="4343400"/>
+            <a:off x="3733800" y="4191000"/>
             <a:ext cx="2567635" cy="1817827"/>
           </a:xfrm>
           <a:prstGeom prst="rect">
@@ -7036,47 +7189,22 @@
                 <a:latin typeface="Calibri" pitchFamily="34" charset="0"/>
                 <a:cs typeface="Calibri" pitchFamily="34" charset="0"/>
               </a:rPr>
-              <a:t>: </a:t>
+              <a:t>: Wednesday </a:t>
+            </a:r>
+            <a:r>
+              <a:rPr lang="en-US" sz="2400" smtClean="0">
+                <a:latin typeface="Calibri" pitchFamily="34" charset="0"/>
+                <a:cs typeface="Calibri" pitchFamily="34" charset="0"/>
+              </a:rPr>
+              <a:t>&amp; Friday: </a:t>
             </a:r>
             <a:r>
               <a:rPr lang="en-US" sz="2400" dirty="0" smtClean="0">
                 <a:latin typeface="Calibri" pitchFamily="34" charset="0"/>
                 <a:cs typeface="Calibri" pitchFamily="34" charset="0"/>
               </a:rPr>
-              <a:t>Wednesday </a:t>
-            </a:r>
-            <a:r>
-              <a:rPr lang="en-US" sz="2400" smtClean="0">
-                <a:latin typeface="Calibri" pitchFamily="34" charset="0"/>
-                <a:cs typeface="Calibri" pitchFamily="34" charset="0"/>
-              </a:rPr>
-              <a:t>&amp; </a:t>
-            </a:r>
-            <a:r>
-              <a:rPr lang="en-US" sz="2400" smtClean="0">
-                <a:latin typeface="Calibri" pitchFamily="34" charset="0"/>
-                <a:cs typeface="Calibri" pitchFamily="34" charset="0"/>
-              </a:rPr>
-              <a:t>Friday: </a:t>
-            </a:r>
-            <a:r>
-              <a:rPr lang="en-US" sz="2400" dirty="0" smtClean="0">
-                <a:latin typeface="Calibri" pitchFamily="34" charset="0"/>
-                <a:cs typeface="Calibri" pitchFamily="34" charset="0"/>
-              </a:rPr>
-              <a:t>13:30 p.m. – 17:10 p.m</a:t>
-            </a:r>
-            <a:r>
-              <a:rPr lang="en-US" sz="2400" dirty="0" smtClean="0">
-                <a:latin typeface="Calibri" pitchFamily="34" charset="0"/>
-                <a:cs typeface="Calibri" pitchFamily="34" charset="0"/>
-              </a:rPr>
-              <a:t>.</a:t>
-            </a:r>
-            <a:endParaRPr lang="en-US" sz="2400" dirty="0" smtClean="0">
-              <a:latin typeface="Calibri" pitchFamily="34" charset="0"/>
-              <a:cs typeface="Calibri" pitchFamily="34" charset="0"/>
-            </a:endParaRPr>
+              <a:t>13:30 p.m. – 17:10 p.m.</a:t>
+            </a:r>
           </a:p>
         </p:txBody>
       </p:sp>
@@ -7916,8 +8044,47 @@
             <a:pPr lvl="0"/>
             <a:r>
               <a:rPr lang="en-US" sz="2200" dirty="0" smtClean="0"/>
-              <a:t>Mark Richards and Neal Ford (2020). Fundamentals of Software Architecture. An Engineering Approach. O'Reilly Media.</a:t>
-            </a:r>
+              <a:t>Robert C. Martin (2017). Clean Architecture. Pearson Education.</a:t>
+            </a:r>
+          </a:p>
+          <a:p>
+            <a:pPr lvl="0"/>
+            <a:r>
+              <a:rPr lang="en-US" sz="2200" dirty="0" smtClean="0"/>
+              <a:t>Michael </a:t>
+            </a:r>
+            <a:r>
+              <a:rPr lang="en-US" sz="2200" dirty="0" err="1" smtClean="0"/>
+              <a:t>Albada</a:t>
+            </a:r>
+            <a:r>
+              <a:rPr lang="en-US" sz="2200" dirty="0" smtClean="0"/>
+              <a:t> (2025). Building Applications with AI Agents. </a:t>
+            </a:r>
+            <a:r>
+              <a:rPr lang="en-US" sz="2200" dirty="0" smtClean="0"/>
+              <a:t>O'Reilly </a:t>
+            </a:r>
+            <a:r>
+              <a:rPr lang="en-US" sz="2200" dirty="0" smtClean="0"/>
+              <a:t>Media.</a:t>
+            </a:r>
+          </a:p>
+          <a:p>
+            <a:pPr lvl="0"/>
+            <a:r>
+              <a:rPr lang="en-US" sz="2200" dirty="0" smtClean="0"/>
+              <a:t>Christian </a:t>
+            </a:r>
+            <a:r>
+              <a:rPr lang="en-US" sz="2200" dirty="0" err="1" smtClean="0"/>
+              <a:t>Kastner</a:t>
+            </a:r>
+            <a:r>
+              <a:rPr lang="en-US" sz="2200" dirty="0" smtClean="0"/>
+              <a:t> (2025). Machine Learning in Production. MIT Press.</a:t>
+            </a:r>
+            <a:endParaRPr lang="en-US" sz="2200" dirty="0" smtClean="0"/>
           </a:p>
         </p:txBody>
       </p:sp>

--- a/Software Design/01. Course Introduction.pptx
+++ b/Software Design/01. Course Introduction.pptx
@@ -247,7 +247,7 @@
             <a:fld id="{DA36EAF5-5497-4E36-9AC6-23E218E1C14C}" type="datetimeFigureOut">
               <a:rPr lang="en-US" smtClean="0"/>
               <a:pPr/>
-              <a:t>5/15/2026</a:t>
+              <a:t>5/19/2026</a:t>
             </a:fld>
             <a:endParaRPr lang="en-US"/>
           </a:p>
@@ -868,7 +868,7 @@
               <a:pPr>
                 <a:defRPr/>
               </a:pPr>
-              <a:t>5/15/2026</a:t>
+              <a:t>5/19/2026</a:t>
             </a:fld>
             <a:endParaRPr lang="en-US"/>
           </a:p>
@@ -1060,7 +1060,7 @@
               <a:pPr>
                 <a:defRPr/>
               </a:pPr>
-              <a:t>5/15/2026</a:t>
+              <a:t>5/19/2026</a:t>
             </a:fld>
             <a:endParaRPr lang="en-US"/>
           </a:p>
@@ -1262,7 +1262,7 @@
               <a:pPr>
                 <a:defRPr/>
               </a:pPr>
-              <a:t>5/15/2026</a:t>
+              <a:t>5/19/2026</a:t>
             </a:fld>
             <a:endParaRPr lang="en-US"/>
           </a:p>
@@ -1454,7 +1454,7 @@
               <a:pPr>
                 <a:defRPr/>
               </a:pPr>
-              <a:t>5/15/2026</a:t>
+              <a:t>5/19/2026</a:t>
             </a:fld>
             <a:endParaRPr lang="en-US"/>
           </a:p>
@@ -1722,7 +1722,7 @@
               <a:pPr>
                 <a:defRPr/>
               </a:pPr>
-              <a:t>5/15/2026</a:t>
+              <a:t>5/19/2026</a:t>
             </a:fld>
             <a:endParaRPr lang="en-US"/>
           </a:p>
@@ -2032,7 +2032,7 @@
               <a:pPr>
                 <a:defRPr/>
               </a:pPr>
-              <a:t>5/15/2026</a:t>
+              <a:t>5/19/2026</a:t>
             </a:fld>
             <a:endParaRPr lang="en-US"/>
           </a:p>
@@ -2476,7 +2476,7 @@
               <a:pPr>
                 <a:defRPr/>
               </a:pPr>
-              <a:t>5/15/2026</a:t>
+              <a:t>5/19/2026</a:t>
             </a:fld>
             <a:endParaRPr lang="en-US"/>
           </a:p>
@@ -2616,7 +2616,7 @@
               <a:pPr>
                 <a:defRPr/>
               </a:pPr>
-              <a:t>5/15/2026</a:t>
+              <a:t>5/19/2026</a:t>
             </a:fld>
             <a:endParaRPr lang="en-US"/>
           </a:p>
@@ -2733,7 +2733,7 @@
               <a:pPr>
                 <a:defRPr/>
               </a:pPr>
-              <a:t>5/15/2026</a:t>
+              <a:t>5/19/2026</a:t>
             </a:fld>
             <a:endParaRPr lang="en-US"/>
           </a:p>
@@ -3032,7 +3032,7 @@
               <a:pPr>
                 <a:defRPr/>
               </a:pPr>
-              <a:t>5/15/2026</a:t>
+              <a:t>5/19/2026</a:t>
             </a:fld>
             <a:endParaRPr lang="en-US"/>
           </a:p>
@@ -3310,7 +3310,7 @@
               <a:pPr>
                 <a:defRPr/>
               </a:pPr>
-              <a:t>5/15/2026</a:t>
+              <a:t>5/19/2026</a:t>
             </a:fld>
             <a:endParaRPr lang="en-US"/>
           </a:p>
@@ -3558,7 +3558,7 @@
               <a:pPr>
                 <a:defRPr/>
               </a:pPr>
-              <a:t>5/15/2026</a:t>
+              <a:t>5/19/2026</a:t>
             </a:fld>
             <a:endParaRPr lang="en-US"/>
           </a:p>
@@ -4457,24 +4457,15 @@
                 <a:ea typeface="Times New Roman" pitchFamily="18" charset="0"/>
                 <a:cs typeface="Arial" pitchFamily="34" charset="0"/>
               </a:rPr>
-              <a:t>Game Development.</a:t>
-            </a:r>
-          </a:p>
-          <a:p>
-            <a:pPr marL="914400" lvl="1" indent="-457200" algn="just" eaLnBrk="0" hangingPunct="0">
-              <a:buFont typeface="Wingdings" pitchFamily="2" charset="2"/>
-              <a:buChar char="§"/>
-              <a:tabLst>
-                <a:tab pos="1371600" algn="l"/>
-              </a:tabLst>
-            </a:pPr>
+              <a:t>Computer </a:t>
+            </a:r>
             <a:r>
               <a:rPr lang="en-US" sz="2000" dirty="0" smtClean="0">
                 <a:latin typeface="+mj-lt"/>
                 <a:ea typeface="Times New Roman" pitchFamily="18" charset="0"/>
                 <a:cs typeface="Arial" pitchFamily="34" charset="0"/>
               </a:rPr>
-              <a:t>Computer Networks.</a:t>
+              <a:t>Networks.</a:t>
             </a:r>
           </a:p>
           <a:p>
@@ -4508,10 +4499,31 @@
               </a:rPr>
               <a:t>:</a:t>
             </a:r>
-            <a:endParaRPr lang="en-US" sz="2000" dirty="0" smtClean="0">
-              <a:latin typeface="+mj-lt"/>
-              <a:cs typeface="Arial" pitchFamily="34" charset="0"/>
-            </a:endParaRPr>
+          </a:p>
+          <a:p>
+            <a:pPr marL="914400" lvl="1" indent="-457200" algn="just" eaLnBrk="0" hangingPunct="0">
+              <a:buFont typeface="Wingdings" pitchFamily="2" charset="2"/>
+              <a:buChar char="§"/>
+              <a:tabLst>
+                <a:tab pos="1371600" algn="l"/>
+              </a:tabLst>
+            </a:pPr>
+            <a:r>
+              <a:rPr lang="en-US" sz="2000" dirty="0" smtClean="0">
+                <a:latin typeface="+mj-lt"/>
+                <a:ea typeface="Times New Roman" pitchFamily="18" charset="0"/>
+                <a:cs typeface="Arial" pitchFamily="34" charset="0"/>
+              </a:rPr>
+              <a:t>Game </a:t>
+            </a:r>
+            <a:r>
+              <a:rPr lang="en-US" sz="2000" dirty="0" smtClean="0">
+                <a:latin typeface="+mj-lt"/>
+                <a:ea typeface="Times New Roman" pitchFamily="18" charset="0"/>
+                <a:cs typeface="Arial" pitchFamily="34" charset="0"/>
+              </a:rPr>
+              <a:t>Development.</a:t>
+            </a:r>
           </a:p>
           <a:p>
             <a:pPr marL="457200" marR="0" lvl="0" indent="-457200" algn="just" defTabSz="914400" rtl="0" eaLnBrk="0" fontAlgn="base" latinLnBrk="0" hangingPunct="0">
@@ -4560,7 +4572,22 @@
                 <a:ea typeface="Times New Roman" pitchFamily="18" charset="0"/>
                 <a:cs typeface="Arial" pitchFamily="34" charset="0"/>
               </a:rPr>
-              <a:t> knowledge and skills</a:t>
+              <a:t> </a:t>
+            </a:r>
+            <a:r>
+              <a:rPr kumimoji="0" lang="en-US" sz="2000" b="1" i="0" u="none" strike="noStrike" cap="none" normalizeH="0" dirty="0" smtClean="0">
+                <a:ln>
+                  <a:noFill/>
+                </a:ln>
+                <a:solidFill>
+                  <a:schemeClr val="tx1"/>
+                </a:solidFill>
+                <a:effectLst/>
+                <a:latin typeface="+mj-lt"/>
+                <a:ea typeface="Times New Roman" pitchFamily="18" charset="0"/>
+                <a:cs typeface="Arial" pitchFamily="34" charset="0"/>
+              </a:rPr>
+              <a:t>knowledge and skills</a:t>
             </a:r>
             <a:r>
               <a:rPr kumimoji="0" lang="en-US" sz="2000" b="0" i="0" u="none" strike="noStrike" cap="none" normalizeH="0" baseline="0" dirty="0" smtClean="0">
@@ -5015,14 +5042,7 @@
                 <a:latin typeface="Calibri" pitchFamily="34" charset="0"/>
                 <a:cs typeface="Calibri" pitchFamily="34" charset="0"/>
               </a:rPr>
-              <a:t> </a:t>
-            </a:r>
-            <a:r>
-              <a:rPr lang="en-US" sz="2400" dirty="0" smtClean="0">
-                <a:latin typeface="Calibri" pitchFamily="34" charset="0"/>
-                <a:cs typeface="Calibri" pitchFamily="34" charset="0"/>
-              </a:rPr>
-              <a:t>software architecture.</a:t>
+              <a:t> software architecture.</a:t>
             </a:r>
           </a:p>
           <a:p>
@@ -5052,19 +5072,8 @@
                 <a:latin typeface="Calibri" pitchFamily="34" charset="0"/>
                 <a:cs typeface="Calibri" pitchFamily="34" charset="0"/>
               </a:rPr>
-              <a:t> </a:t>
-            </a:r>
-            <a:r>
-              <a:rPr lang="en-US" sz="2400" dirty="0" smtClean="0">
-                <a:latin typeface="Calibri" pitchFamily="34" charset="0"/>
-                <a:cs typeface="Calibri" pitchFamily="34" charset="0"/>
-              </a:rPr>
-              <a:t>to design, recover, refine, communicate, and evaluate software architecture.</a:t>
-            </a:r>
-            <a:endParaRPr lang="en-US" sz="2400" dirty="0" smtClean="0">
-              <a:latin typeface="Calibri" pitchFamily="34" charset="0"/>
-              <a:cs typeface="Calibri" pitchFamily="34" charset="0"/>
-            </a:endParaRPr>
+              <a:t> to design, recover, refine, communicate, and evaluate software architecture.</a:t>
+            </a:r>
           </a:p>
           <a:p>
             <a:pPr>
@@ -5681,7 +5690,7 @@
             </a:pPr>
             <a:r>
               <a:rPr lang="en-US" sz="2400" dirty="0" smtClean="0"/>
-              <a:t>Application Frameworks</a:t>
+              <a:t>Micro-Frontends</a:t>
             </a:r>
           </a:p>
           <a:p>
@@ -5690,9 +5699,10 @@
               <a:buAutoNum type="romanUcPeriod"/>
             </a:pPr>
             <a:r>
-              <a:rPr lang="en-US" sz="2400" dirty="0" smtClean="0"/>
-              <a:t>Domain-Driven Design</a:t>
-            </a:r>
+              <a:rPr lang="en-US" sz="2400" dirty="0" err="1" smtClean="0"/>
+              <a:t>JAMstack</a:t>
+            </a:r>
+            <a:endParaRPr lang="en-US" sz="2400" dirty="0" smtClean="0"/>
           </a:p>
           <a:p>
             <a:pPr marL="571500" indent="-571500">
@@ -5701,7 +5711,7 @@
             </a:pPr>
             <a:r>
               <a:rPr lang="en-US" sz="2400" dirty="0" smtClean="0"/>
-              <a:t>The Clean Architecture</a:t>
+              <a:t>Application Framework Architecture</a:t>
             </a:r>
           </a:p>
           <a:p>
@@ -5711,7 +5721,7 @@
             </a:pPr>
             <a:r>
               <a:rPr lang="en-US" sz="2400" dirty="0" smtClean="0"/>
-              <a:t>Transactional Processing</a:t>
+              <a:t>Domain-Driven Design</a:t>
             </a:r>
           </a:p>
           <a:p>
@@ -5721,7 +5731,21 @@
             </a:pPr>
             <a:r>
               <a:rPr lang="en-US" sz="2400" dirty="0" smtClean="0"/>
-              <a:t>CQRS and Event Sourcing</a:t>
+              <a:t>The Clean Architecture</a:t>
+            </a:r>
+          </a:p>
+          <a:p>
+            <a:pPr marL="571500" indent="-571500">
+              <a:buFont typeface="+mj-lt"/>
+              <a:buAutoNum type="romanUcPeriod"/>
+            </a:pPr>
+            <a:r>
+              <a:rPr lang="en-US" sz="2400" dirty="0" smtClean="0"/>
+              <a:t>Transactional </a:t>
+            </a:r>
+            <a:r>
+              <a:rPr lang="en-US" sz="2400" dirty="0" smtClean="0"/>
+              <a:t>Processing</a:t>
             </a:r>
           </a:p>
         </p:txBody>
@@ -5931,7 +5955,21 @@
             </a:pPr>
             <a:r>
               <a:rPr lang="en-US" sz="2400" dirty="0" smtClean="0"/>
-              <a:t>Message Brokers</a:t>
+              <a:t>CQRS and Event Sourcing</a:t>
+            </a:r>
+          </a:p>
+          <a:p>
+            <a:pPr marL="571500" indent="-571500">
+              <a:buFont typeface="+mj-lt"/>
+              <a:buAutoNum type="romanUcPeriod"/>
+            </a:pPr>
+            <a:r>
+              <a:rPr lang="en-US" sz="2400" dirty="0" smtClean="0"/>
+              <a:t>Message </a:t>
+            </a:r>
+            <a:r>
+              <a:rPr lang="en-US" sz="2400" dirty="0" smtClean="0"/>
+              <a:t>Brokers</a:t>
             </a:r>
           </a:p>
           <a:p>
@@ -6111,17 +6149,7 @@
                 <a:latin typeface="Calibri" pitchFamily="34" charset="0"/>
                 <a:cs typeface="Calibri" pitchFamily="34" charset="0"/>
               </a:rPr>
-              <a:t>	</a:t>
-            </a:r>
-            <a:r>
-              <a:rPr lang="en-US" sz="2600" i="1" dirty="0" smtClean="0">
-                <a:solidFill>
-                  <a:srgbClr val="C00000"/>
-                </a:solidFill>
-                <a:latin typeface="Calibri" pitchFamily="34" charset="0"/>
-                <a:cs typeface="Calibri" pitchFamily="34" charset="0"/>
-              </a:rPr>
-              <a:t>90</a:t>
+              <a:t>	90</a:t>
             </a:r>
             <a:endParaRPr lang="en-US" sz="2600" i="1" dirty="0">
               <a:solidFill>
@@ -6384,81 +6412,53 @@
                 <a:latin typeface="Calibri" pitchFamily="34" charset="0"/>
                 <a:cs typeface="Calibri" pitchFamily="34" charset="0"/>
               </a:rPr>
-              <a:t>Midterm </a:t>
-            </a:r>
+              <a:t>Midterm exam (first 2 labs) (20%)</a:t>
+            </a:r>
+          </a:p>
+          <a:p>
+            <a:pPr lvl="1">
+              <a:buFont typeface="Wingdings" pitchFamily="2" charset="2"/>
+              <a:buChar char="§"/>
+            </a:pPr>
             <a:r>
               <a:rPr lang="en-US" sz="2000" dirty="0" smtClean="0">
                 <a:latin typeface="Calibri" pitchFamily="34" charset="0"/>
                 <a:cs typeface="Calibri" pitchFamily="34" charset="0"/>
               </a:rPr>
-              <a:t>exam (</a:t>
+              <a:t>4 </a:t>
+            </a:r>
+            <a:r>
+              <a:rPr lang="en-US" sz="2000" smtClean="0">
+                <a:latin typeface="Calibri" pitchFamily="34" charset="0"/>
+                <a:cs typeface="Calibri" pitchFamily="34" charset="0"/>
+              </a:rPr>
+              <a:t>additional </a:t>
+            </a:r>
+            <a:r>
+              <a:rPr lang="en-US" sz="2000" smtClean="0">
+                <a:latin typeface="Calibri" pitchFamily="34" charset="0"/>
+                <a:cs typeface="Calibri" pitchFamily="34" charset="0"/>
+              </a:rPr>
+              <a:t>labs </a:t>
             </a:r>
             <a:r>
               <a:rPr lang="en-US" sz="2000" dirty="0" smtClean="0">
                 <a:latin typeface="Calibri" pitchFamily="34" charset="0"/>
                 <a:cs typeface="Calibri" pitchFamily="34" charset="0"/>
               </a:rPr>
-              <a:t>first </a:t>
-            </a:r>
+              <a:t>(40%)</a:t>
+            </a:r>
+          </a:p>
+          <a:p>
+            <a:pPr lvl="1">
+              <a:buFont typeface="Wingdings" pitchFamily="2" charset="2"/>
+              <a:buChar char="§"/>
+            </a:pPr>
             <a:r>
               <a:rPr lang="en-US" sz="2000" dirty="0" smtClean="0">
                 <a:latin typeface="Calibri" pitchFamily="34" charset="0"/>
                 <a:cs typeface="Calibri" pitchFamily="34" charset="0"/>
               </a:rPr>
-              <a:t>2 labs) </a:t>
-            </a:r>
-            <a:r>
-              <a:rPr lang="en-US" sz="2000" dirty="0" smtClean="0">
-                <a:latin typeface="Calibri" pitchFamily="34" charset="0"/>
-                <a:cs typeface="Calibri" pitchFamily="34" charset="0"/>
-              </a:rPr>
-              <a:t>(20</a:t>
-            </a:r>
-            <a:r>
-              <a:rPr lang="en-US" sz="2000" dirty="0" smtClean="0">
-                <a:latin typeface="Calibri" pitchFamily="34" charset="0"/>
-                <a:cs typeface="Calibri" pitchFamily="34" charset="0"/>
-              </a:rPr>
-              <a:t>%)</a:t>
-            </a:r>
-          </a:p>
-          <a:p>
-            <a:pPr lvl="1">
-              <a:buFont typeface="Wingdings" pitchFamily="2" charset="2"/>
-              <a:buChar char="§"/>
-            </a:pPr>
-            <a:r>
-              <a:rPr lang="en-US" sz="2000" dirty="0" smtClean="0">
-                <a:latin typeface="Calibri" pitchFamily="34" charset="0"/>
-                <a:cs typeface="Calibri" pitchFamily="34" charset="0"/>
-              </a:rPr>
-              <a:t>4</a:t>
-            </a:r>
-            <a:r>
-              <a:rPr lang="en-US" sz="2000" dirty="0" smtClean="0">
-                <a:latin typeface="Calibri" pitchFamily="34" charset="0"/>
-                <a:cs typeface="Calibri" pitchFamily="34" charset="0"/>
-              </a:rPr>
-              <a:t> additional individual labs </a:t>
-            </a:r>
-            <a:r>
-              <a:rPr lang="en-US" sz="2000" dirty="0" smtClean="0">
-                <a:latin typeface="Calibri" pitchFamily="34" charset="0"/>
-                <a:cs typeface="Calibri" pitchFamily="34" charset="0"/>
-              </a:rPr>
-              <a:t>(40%)</a:t>
-            </a:r>
-          </a:p>
-          <a:p>
-            <a:pPr lvl="1">
-              <a:buFont typeface="Wingdings" pitchFamily="2" charset="2"/>
-              <a:buChar char="§"/>
-            </a:pPr>
-            <a:r>
-              <a:rPr lang="en-US" sz="2000" dirty="0" smtClean="0">
-                <a:latin typeface="Calibri" pitchFamily="34" charset="0"/>
-                <a:cs typeface="Calibri" pitchFamily="34" charset="0"/>
-              </a:rPr>
               <a:t>Final oral exam (40%)</a:t>
             </a:r>
           </a:p>
@@ -6472,14 +6472,7 @@
                 <a:latin typeface="Calibri" pitchFamily="34" charset="0"/>
                 <a:cs typeface="Calibri" pitchFamily="34" charset="0"/>
               </a:rPr>
-              <a:t>Bonus </a:t>
-            </a:r>
-            <a:r>
-              <a:rPr lang="en-US" sz="2400" b="1" dirty="0" smtClean="0">
-                <a:latin typeface="Calibri" pitchFamily="34" charset="0"/>
-                <a:cs typeface="Calibri" pitchFamily="34" charset="0"/>
-              </a:rPr>
-              <a:t>points (up to 20%) for:</a:t>
+              <a:t>Bonus points (up to 20%) for:</a:t>
             </a:r>
           </a:p>
           <a:p>
@@ -6721,29 +6714,15 @@
             <a:pPr lvl="0"/>
             <a:r>
               <a:rPr lang="en-US" sz="2400" dirty="0" smtClean="0"/>
-              <a:t>Lab 02: </a:t>
-            </a:r>
+              <a:t>Lab 02: The Clean Architecture and Domain Driven Design.</a:t>
+            </a:r>
+          </a:p>
+          <a:p>
+            <a:pPr lvl="0"/>
             <a:r>
               <a:rPr lang="en-US" sz="2400" dirty="0" smtClean="0"/>
-              <a:t>The Clean Architecture and Domain Driven </a:t>
-            </a:r>
-            <a:r>
-              <a:rPr lang="en-US" sz="2400" dirty="0" smtClean="0"/>
-              <a:t>Design.</a:t>
-            </a:r>
-            <a:endParaRPr lang="en-US" sz="2400" dirty="0" smtClean="0"/>
-          </a:p>
-          <a:p>
-            <a:pPr lvl="0"/>
-            <a:r>
-              <a:rPr lang="en-US" sz="2400" dirty="0" smtClean="0"/>
-              <a:t>Held in classroom</a:t>
-            </a:r>
-            <a:r>
-              <a:rPr lang="en-US" sz="2400" dirty="0" smtClean="0"/>
-              <a:t>.</a:t>
-            </a:r>
-            <a:endParaRPr lang="en-US" sz="2400" dirty="0" smtClean="0"/>
+              <a:t>Held in classroom.</a:t>
+            </a:r>
           </a:p>
         </p:txBody>
       </p:sp>
@@ -6818,22 +6797,11 @@
                 <a:latin typeface="Calibri" pitchFamily="34" charset="0"/>
                 <a:cs typeface="Calibri" pitchFamily="34" charset="0"/>
               </a:rPr>
-              <a:t>4 </a:t>
-            </a:r>
-            <a:r>
-              <a:rPr lang="en-US" dirty="0" smtClean="0">
-                <a:latin typeface="Calibri" pitchFamily="34" charset="0"/>
-                <a:cs typeface="Calibri" pitchFamily="34" charset="0"/>
-              </a:rPr>
-              <a:t>Additional </a:t>
+              <a:t>4 Additional </a:t>
             </a:r>
             <a:r>
               <a:rPr lang="en-US" dirty="0" smtClean="0"/>
-              <a:t>Individual </a:t>
-            </a:r>
-            <a:r>
-              <a:rPr lang="en-US" dirty="0" smtClean="0"/>
-              <a:t>Labs (40%)</a:t>
+              <a:t>Individual Labs (40%)</a:t>
             </a:r>
             <a:endParaRPr lang="en-US" dirty="0"/>
           </a:p>
@@ -6856,51 +6824,19 @@
           <a:p>
             <a:r>
               <a:rPr lang="en-US" sz="2400" dirty="0" smtClean="0"/>
-              <a:t>CQRS and Event Sourcing</a:t>
-            </a:r>
+              <a:t>CQRS and Event Sourcing: 10%</a:t>
+            </a:r>
+          </a:p>
+          <a:p>
             <a:r>
               <a:rPr lang="en-US" sz="2400" dirty="0" smtClean="0"/>
-              <a:t>: </a:t>
-            </a:r>
+              <a:t>Event-Driven Architecture, or Serverless Architecture, or Kappa Architecture: 10%</a:t>
+            </a:r>
+          </a:p>
+          <a:p>
             <a:r>
               <a:rPr lang="en-US" sz="2400" dirty="0" smtClean="0"/>
-              <a:t>10</a:t>
-            </a:r>
-            <a:r>
-              <a:rPr lang="en-US" sz="2400" dirty="0" smtClean="0"/>
-              <a:t>%</a:t>
-            </a:r>
-          </a:p>
-          <a:p>
-            <a:r>
-              <a:rPr lang="en-US" sz="2400" dirty="0" smtClean="0"/>
-              <a:t>Event-Driven Architecture, or Serverless Architecture, or Kappa Architecture</a:t>
-            </a:r>
-            <a:r>
-              <a:rPr lang="en-US" sz="2400" dirty="0" smtClean="0"/>
-              <a:t>: </a:t>
-            </a:r>
-            <a:r>
-              <a:rPr lang="en-US" sz="2400" dirty="0" smtClean="0"/>
-              <a:t>10%</a:t>
-            </a:r>
-          </a:p>
-          <a:p>
-            <a:r>
-              <a:rPr lang="en-US" sz="2400" dirty="0" smtClean="0"/>
-              <a:t>AI </a:t>
-            </a:r>
-            <a:r>
-              <a:rPr lang="en-US" sz="2400" dirty="0" smtClean="0"/>
-              <a:t>Agent Frameworks and Design </a:t>
-            </a:r>
-            <a:r>
-              <a:rPr lang="en-US" sz="2400" dirty="0" smtClean="0"/>
-              <a:t>Patterns</a:t>
-            </a:r>
-            <a:r>
-              <a:rPr lang="en-US" sz="2400" dirty="0" smtClean="0"/>
-              <a:t>: 10%</a:t>
+              <a:t>AI Agent Frameworks and Design Patterns: 10%</a:t>
             </a:r>
           </a:p>
           <a:p>
@@ -8059,15 +7995,7 @@
             </a:r>
             <a:r>
               <a:rPr lang="en-US" sz="2200" dirty="0" smtClean="0"/>
-              <a:t> (2025). Building Applications with AI Agents. </a:t>
-            </a:r>
-            <a:r>
-              <a:rPr lang="en-US" sz="2200" dirty="0" smtClean="0"/>
-              <a:t>O'Reilly </a:t>
-            </a:r>
-            <a:r>
-              <a:rPr lang="en-US" sz="2200" dirty="0" smtClean="0"/>
-              <a:t>Media.</a:t>
+              <a:t> (2025). Building Applications with AI Agents. O'Reilly Media.</a:t>
             </a:r>
           </a:p>
           <a:p>
@@ -8084,7 +8012,6 @@
               <a:rPr lang="en-US" sz="2200" dirty="0" smtClean="0"/>
               <a:t> (2025). Machine Learning in Production. MIT Press.</a:t>
             </a:r>
-            <a:endParaRPr lang="en-US" sz="2200" dirty="0" smtClean="0"/>
           </a:p>
         </p:txBody>
       </p:sp>
